--- a/revisions/QuantumEntangledMultiplexingTransceiver_Rev10.pptx
+++ b/revisions/QuantumEntangledMultiplexingTransceiver_Rev10.pptx
@@ -3231,7 +3231,7 @@
         <p:spPr>
           <a:xfrm>
             <a:off x="0" y="8046720"/>
-            <a:ext cx="6858000" cy="1645920"/>
+            <a:ext cx="6858000" cy="523220"/>
           </a:xfrm>
           <a:prstGeom prst="rect">
             <a:avLst/>
@@ -3251,8 +3251,16 @@
                   <a:srgbClr val="788598"/>
                 </a:solidFill>
               </a:rPr>
-              <a:t>Daniel Miles  ·  2026  ·  Original Concept Paper  ·  Rev.2
-https://alternitech.square.site</a:t>
+              <a:t>Daniel Miles  ·  2026  ·  Original Concept Paper  ·  Rev.10
+</a:t>
+            </a:r>
+            <a:r>
+              <a:rPr lang="en-GB" sz="1400" dirty="0">
+                <a:solidFill>
+                  <a:srgbClr val="788598"/>
+                </a:solidFill>
+              </a:rPr>
+              <a:t>https://alternitech.square.site</a:t>
             </a:r>
           </a:p>
         </p:txBody>
@@ -14058,7 +14066,7 @@
         <p:spPr>
           <a:xfrm>
             <a:off x="150187" y="671901"/>
-            <a:ext cx="6563531" cy="7181453"/>
+            <a:ext cx="6563531" cy="6735177"/>
           </a:xfrm>
           <a:prstGeom prst="rect">
             <a:avLst/>
@@ -14219,25 +14227,6 @@
                 </a:solidFill>
               </a:rPr>
               <a:t>The NCT is confirmed in a previously untested regime. Publishable result. The apparatus - a precision Ca⁺ orientation control and continuous weak-measurement system - is a world-class quantum sensor applicable to atomic clocks, gravitational wave detection, and quantum key distribution.</a:t>
-            </a:r>
-          </a:p>
-          <a:p>
-            <a:pPr algn="l"/>
-            <a:endParaRPr lang="en-GB" sz="1600" dirty="0">
-              <a:solidFill>
-                <a:srgbClr val="1E1E1E"/>
-              </a:solidFill>
-            </a:endParaRPr>
-          </a:p>
-          <a:p>
-            <a:pPr algn="l"/>
-            <a:r>
-              <a:rPr lang="en-GB" sz="1300" dirty="0">
-                <a:solidFill>
-                  <a:srgbClr val="788598"/>
-                </a:solidFill>
-              </a:rPr>
-              <a:t>The device is the experiment. The experiment is the device. The network is what comes after.</a:t>
             </a:r>
           </a:p>
         </p:txBody>

--- a/revisions/QuantumEntangledMultiplexingTransceiver_Rev10.pptx
+++ b/revisions/QuantumEntangledMultiplexingTransceiver_Rev10.pptx
@@ -3145,7 +3145,7 @@
         <p:spPr>
           <a:xfrm>
             <a:off x="0" y="1645920"/>
-            <a:ext cx="6858000" cy="1261884"/>
+            <a:ext cx="6858000" cy="1754326"/>
           </a:xfrm>
           <a:prstGeom prst="rect">
             <a:avLst/>
@@ -3176,7 +3176,7 @@
                   <a:srgbClr val="0F172A"/>
                 </a:solidFill>
               </a:rPr>
-              <a:t>Entangled Multiplexing Transceiver</a:t>
+              <a:t>Entangled Multiplexing Transceiver &amp; Shared Spin-State Hypothesis</a:t>
             </a:r>
             <a:endParaRPr lang="en-GB" sz="4400" b="1" dirty="0">
               <a:solidFill>
@@ -3246,21 +3246,13 @@
           <a:p>
             <a:pPr algn="ctr"/>
             <a:r>
-              <a:rPr lang="en-GB" sz="1400">
+              <a:rPr lang="en-GB" sz="1400" dirty="0">
                 <a:solidFill>
                   <a:srgbClr val="788598"/>
                 </a:solidFill>
               </a:rPr>
               <a:t>Daniel Miles  ·  2026  ·  Original Concept Paper  ·  Rev.10
-</a:t>
-            </a:r>
-            <a:r>
-              <a:rPr lang="en-GB" sz="1400" dirty="0">
-                <a:solidFill>
-                  <a:srgbClr val="788598"/>
-                </a:solidFill>
-              </a:rPr>
-              <a:t>https://alternitech.square.site</a:t>
+https://alternitech.square.site</a:t>
             </a:r>
           </a:p>
         </p:txBody>

--- a/revisions/QuantumEntangledMultiplexingTransceiver_Rev10.pptx
+++ b/revisions/QuantumEntangledMultiplexingTransceiver_Rev10.pptx
@@ -3186,42 +3186,361 @@
           </a:p>
         </p:txBody>
       </p:sp>
-      <p:sp>
-        <p:nvSpPr>
-          <p:cNvPr id="4" name="TextBox 3"/>
-          <p:cNvSpPr txBox="1"/>
-          <p:nvPr/>
-        </p:nvSpPr>
-        <p:spPr>
-          <a:xfrm>
-            <a:off x="0" y="4902586"/>
-            <a:ext cx="6858000" cy="877163"/>
-          </a:xfrm>
-          <a:prstGeom prst="rect">
-            <a:avLst/>
-          </a:prstGeom>
-          <a:noFill/>
-        </p:spPr>
-        <p:txBody>
-          <a:bodyPr wrap="square" anchor="ctr">
-            <a:spAutoFit/>
-          </a:bodyPr>
-          <a:lstStyle/>
-          <a:p>
-            <a:pPr algn="ctr"/>
-            <a:r>
-              <a:rPr lang="en-GB" sz="1700" dirty="0">
-                <a:solidFill>
-                  <a:srgbClr val="556581"/>
-                </a:solidFill>
-              </a:rPr>
-              <a:t>A proposed architecture for non-classical signalling via
+      <mc:AlternateContent xmlns:mc="http://schemas.openxmlformats.org/markup-compatibility/2006">
+        <mc:Choice xmlns:a14="http://schemas.microsoft.com/office/drawing/2010/main" Requires="a14">
+          <p:sp>
+            <p:nvSpPr>
+              <p:cNvPr id="4" name="TextBox 3"/>
+              <p:cNvSpPr txBox="1"/>
+              <p:nvPr/>
+            </p:nvSpPr>
+            <p:spPr>
+              <a:xfrm>
+                <a:off x="0" y="3724411"/>
+                <a:ext cx="6858000" cy="3233514"/>
+              </a:xfrm>
+              <a:prstGeom prst="rect">
+                <a:avLst/>
+              </a:prstGeom>
+              <a:noFill/>
+            </p:spPr>
+            <p:txBody>
+              <a:bodyPr wrap="square" anchor="ctr">
+                <a:spAutoFit/>
+              </a:bodyPr>
+              <a:lstStyle/>
+              <a:p>
+                <a:pPr algn="ctr"/>
+                <a:r>
+                  <a:rPr lang="en-GB" sz="1700" dirty="0">
+                    <a:solidFill>
+                      <a:srgbClr val="7E838D"/>
+                    </a:solidFill>
+                  </a:rPr>
+                  <a:t>A proposed architecture for non-classical signalling via
 entangled Ca⁺ ion pairs, orientation encoding, and
 ensemble weak measurement in a linear ion trap.</a:t>
-            </a:r>
-          </a:p>
-        </p:txBody>
-      </p:sp>
+                </a:r>
+              </a:p>
+              <a:p>
+                <a:pPr algn="ctr"/>
+                <a:endParaRPr lang="en-GB" sz="1700" dirty="0">
+                  <a:solidFill>
+                    <a:srgbClr val="7E838D"/>
+                  </a:solidFill>
+                </a:endParaRPr>
+              </a:p>
+              <a:p>
+                <a:pPr algn="ctr"/>
+                <a:r>
+                  <a:rPr lang="en-GB" sz="1600" dirty="0">
+                    <a:solidFill>
+                      <a:srgbClr val="7E838D"/>
+                    </a:solidFill>
+                  </a:rPr>
+                  <a:t>The hypothesis reduces to one measurable statement:</a:t>
+                </a:r>
+              </a:p>
+              <a:p>
+                <a:pPr algn="ctr"/>
+                <a:r>
+                  <a:rPr lang="en-GB" sz="1600" dirty="0">
+                    <a:solidFill>
+                      <a:srgbClr val="7E838D"/>
+                    </a:solidFill>
+                  </a:rPr>
+                  <a:t>Particle B’s local expectation value depends on Particle A’s </a:t>
+                </a:r>
+                <a:r>
+                  <a:rPr lang="el-GR" sz="1600" dirty="0">
+                    <a:solidFill>
+                      <a:srgbClr val="7E838D"/>
+                    </a:solidFill>
+                  </a:rPr>
+                  <a:t>θ</a:t>
+                </a:r>
+                <a:endParaRPr lang="en-GB" sz="1600" dirty="0">
+                  <a:solidFill>
+                    <a:srgbClr val="7E838D"/>
+                  </a:solidFill>
+                </a:endParaRPr>
+              </a:p>
+              <a:p>
+                <a:pPr algn="ctr"/>
+                <a:endParaRPr lang="en-GB" sz="1600" dirty="0">
+                  <a:solidFill>
+                    <a:srgbClr val="7E838D"/>
+                  </a:solidFill>
+                </a:endParaRPr>
+              </a:p>
+              <a:p>
+                <a:pPr algn="ctr"/>
+                <a:r>
+                  <a:rPr lang="en-GB" sz="1600" dirty="0">
+                    <a:solidFill>
+                      <a:srgbClr val="7E838D"/>
+                    </a:solidFill>
+                  </a:rPr>
+                  <a:t>Current Quantum Mechanics (QM) prediction:</a:t>
+                </a:r>
+              </a:p>
+              <a:p>
+                <a:pPr algn="ctr"/>
+                <a14:m>
+                  <m:oMathPara xmlns:m="http://schemas.openxmlformats.org/officeDocument/2006/math">
+                    <m:oMathParaPr>
+                      <m:jc m:val="centerGroup"/>
+                    </m:oMathParaPr>
+                    <m:oMath xmlns:m="http://schemas.openxmlformats.org/officeDocument/2006/math">
+                      <m:f>
+                        <m:fPr>
+                          <m:ctrlPr>
+                            <a:rPr lang="ar-AE" i="1">
+                              <a:solidFill>
+                                <a:srgbClr val="7E838D"/>
+                              </a:solidFill>
+                              <a:latin typeface="Cambria Math" panose="02040503050406030204" pitchFamily="18" charset="0"/>
+                            </a:rPr>
+                          </m:ctrlPr>
+                        </m:fPr>
+                        <m:num>
+                          <m:r>
+                            <a:rPr lang="ar-AE" i="1">
+                              <a:solidFill>
+                                <a:srgbClr val="7E838D"/>
+                              </a:solidFill>
+                              <a:latin typeface="Cambria Math" panose="02040503050406030204" pitchFamily="18" charset="0"/>
+                            </a:rPr>
+                            <m:t>𝑑</m:t>
+                          </m:r>
+                        </m:num>
+                        <m:den>
+                          <m:r>
+                            <a:rPr lang="ar-AE" i="1">
+                              <a:solidFill>
+                                <a:srgbClr val="7E838D"/>
+                              </a:solidFill>
+                              <a:latin typeface="Cambria Math" panose="02040503050406030204" pitchFamily="18" charset="0"/>
+                            </a:rPr>
+                            <m:t>𝑑</m:t>
+                          </m:r>
+                          <m:sSub>
+                            <m:sSubPr>
+                              <m:ctrlPr>
+                                <a:rPr lang="ar-AE" i="1">
+                                  <a:solidFill>
+                                    <a:srgbClr val="7E838D"/>
+                                  </a:solidFill>
+                                  <a:latin typeface="Cambria Math" panose="02040503050406030204" pitchFamily="18" charset="0"/>
+                                </a:rPr>
+                              </m:ctrlPr>
+                            </m:sSubPr>
+                            <m:e>
+                              <m:r>
+                                <a:rPr lang="ar-AE" i="1">
+                                  <a:solidFill>
+                                    <a:srgbClr val="7E838D"/>
+                                  </a:solidFill>
+                                  <a:latin typeface="Cambria Math" panose="02040503050406030204" pitchFamily="18" charset="0"/>
+                                </a:rPr>
+                                <m:t>𝜃</m:t>
+                              </m:r>
+                            </m:e>
+                            <m:sub>
+                              <m:r>
+                                <a:rPr lang="ar-AE" i="1">
+                                  <a:solidFill>
+                                    <a:srgbClr val="7E838D"/>
+                                  </a:solidFill>
+                                  <a:latin typeface="Cambria Math" panose="02040503050406030204" pitchFamily="18" charset="0"/>
+                                </a:rPr>
+                                <m:t>𝐴</m:t>
+                              </m:r>
+                            </m:sub>
+                          </m:sSub>
+                        </m:den>
+                      </m:f>
+                      <m:d>
+                        <m:dPr>
+                          <m:begChr m:val="⟨"/>
+                          <m:endChr m:val="⟩"/>
+                          <m:ctrlPr>
+                            <a:rPr lang="ar-AE" i="1">
+                              <a:solidFill>
+                                <a:srgbClr val="7E838D"/>
+                              </a:solidFill>
+                              <a:latin typeface="Cambria Math" panose="02040503050406030204" pitchFamily="18" charset="0"/>
+                            </a:rPr>
+                          </m:ctrlPr>
+                        </m:dPr>
+                        <m:e>
+                          <m:sSub>
+                            <m:sSubPr>
+                              <m:ctrlPr>
+                                <a:rPr lang="ar-AE" i="1">
+                                  <a:solidFill>
+                                    <a:srgbClr val="7E838D"/>
+                                  </a:solidFill>
+                                  <a:latin typeface="Cambria Math" panose="02040503050406030204" pitchFamily="18" charset="0"/>
+                                </a:rPr>
+                              </m:ctrlPr>
+                            </m:sSubPr>
+                            <m:e>
+                              <m:r>
+                                <a:rPr lang="ar-AE" i="1">
+                                  <a:solidFill>
+                                    <a:srgbClr val="7E838D"/>
+                                  </a:solidFill>
+                                  <a:latin typeface="Cambria Math" panose="02040503050406030204" pitchFamily="18" charset="0"/>
+                                </a:rPr>
+                                <m:t>𝑂</m:t>
+                              </m:r>
+                            </m:e>
+                            <m:sub>
+                              <m:r>
+                                <a:rPr lang="ar-AE" i="1">
+                                  <a:solidFill>
+                                    <a:srgbClr val="7E838D"/>
+                                  </a:solidFill>
+                                  <a:latin typeface="Cambria Math" panose="02040503050406030204" pitchFamily="18" charset="0"/>
+                                </a:rPr>
+                                <m:t>𝐵</m:t>
+                              </m:r>
+                            </m:sub>
+                          </m:sSub>
+                        </m:e>
+                      </m:d>
+                      <m:r>
+                        <a:rPr lang="ar-AE">
+                          <a:solidFill>
+                            <a:srgbClr val="7E838D"/>
+                          </a:solidFill>
+                          <a:latin typeface="Cambria Math" panose="02040503050406030204" pitchFamily="18" charset="0"/>
+                        </a:rPr>
+                        <m:t>=</m:t>
+                      </m:r>
+                      <m:r>
+                        <a:rPr lang="ar-AE">
+                          <a:solidFill>
+                            <a:srgbClr val="7E838D"/>
+                          </a:solidFill>
+                          <a:latin typeface="Cambria Math" panose="02040503050406030204" pitchFamily="18" charset="0"/>
+                        </a:rPr>
+                        <m:t>0</m:t>
+                      </m:r>
+                    </m:oMath>
+                  </m:oMathPara>
+                </a14:m>
+                <a:endParaRPr lang="ar-AE" sz="1600" dirty="0">
+                  <a:solidFill>
+                    <a:srgbClr val="7E838D"/>
+                  </a:solidFill>
+                </a:endParaRPr>
+              </a:p>
+              <a:p>
+                <a:pPr algn="ctr"/>
+                <a:r>
+                  <a:rPr lang="en-GB" sz="1600" dirty="0">
+                    <a:solidFill>
+                      <a:srgbClr val="7E838D"/>
+                    </a:solidFill>
+                  </a:rPr>
+                  <a:t>for any observable </a:t>
+                </a:r>
+                <a14:m>
+                  <m:oMath xmlns:m="http://schemas.openxmlformats.org/officeDocument/2006/math">
+                    <m:sSub>
+                      <m:sSubPr>
+                        <m:ctrlPr>
+                          <a:rPr lang="ar-AE" i="1">
+                            <a:solidFill>
+                              <a:srgbClr val="7E838D"/>
+                            </a:solidFill>
+                            <a:latin typeface="Cambria Math" panose="02040503050406030204" pitchFamily="18" charset="0"/>
+                          </a:rPr>
+                        </m:ctrlPr>
+                      </m:sSubPr>
+                      <m:e>
+                        <m:r>
+                          <a:rPr lang="ar-AE" i="1">
+                            <a:solidFill>
+                              <a:srgbClr val="7E838D"/>
+                            </a:solidFill>
+                            <a:latin typeface="Cambria Math" panose="02040503050406030204" pitchFamily="18" charset="0"/>
+                          </a:rPr>
+                          <m:t>𝑂</m:t>
+                        </m:r>
+                      </m:e>
+                      <m:sub>
+                        <m:r>
+                          <a:rPr lang="ar-AE" i="1">
+                            <a:solidFill>
+                              <a:srgbClr val="7E838D"/>
+                            </a:solidFill>
+                            <a:latin typeface="Cambria Math" panose="02040503050406030204" pitchFamily="18" charset="0"/>
+                          </a:rPr>
+                          <m:t>𝐵</m:t>
+                        </m:r>
+                      </m:sub>
+                    </m:sSub>
+                  </m:oMath>
+                </a14:m>
+                <a:endParaRPr lang="ar-AE" sz="1600" dirty="0">
+                  <a:solidFill>
+                    <a:srgbClr val="7E838D"/>
+                  </a:solidFill>
+                </a:endParaRPr>
+              </a:p>
+              <a:p>
+                <a:pPr algn="ctr"/>
+                <a:endParaRPr lang="en-GB" sz="1700" dirty="0">
+                  <a:solidFill>
+                    <a:srgbClr val="7E838D"/>
+                  </a:solidFill>
+                </a:endParaRPr>
+              </a:p>
+            </p:txBody>
+          </p:sp>
+        </mc:Choice>
+        <mc:Fallback>
+          <p:sp>
+            <p:nvSpPr>
+              <p:cNvPr id="4" name="TextBox 3"/>
+              <p:cNvSpPr txBox="1">
+                <a:spLocks noRot="1" noChangeAspect="1" noMove="1" noResize="1" noEditPoints="1" noAdjustHandles="1" noChangeArrowheads="1" noChangeShapeType="1" noTextEdit="1"/>
+              </p:cNvSpPr>
+              <p:nvPr/>
+            </p:nvSpPr>
+            <p:spPr>
+              <a:xfrm>
+                <a:off x="0" y="3724411"/>
+                <a:ext cx="6858000" cy="3233514"/>
+              </a:xfrm>
+              <a:prstGeom prst="rect">
+                <a:avLst/>
+              </a:prstGeom>
+              <a:blipFill>
+                <a:blip r:embed="rId2"/>
+                <a:stretch>
+                  <a:fillRect t="-189"/>
+                </a:stretch>
+              </a:blipFill>
+            </p:spPr>
+            <p:txBody>
+              <a:bodyPr/>
+              <a:lstStyle/>
+              <a:p>
+                <a:r>
+                  <a:rPr lang="en-GB">
+                    <a:noFill/>
+                  </a:rPr>
+                  <a:t> </a:t>
+                </a:r>
+              </a:p>
+            </p:txBody>
+          </p:sp>
+        </mc:Fallback>
+      </mc:AlternateContent>
       <p:sp>
         <p:nvSpPr>
           <p:cNvPr id="5" name="TextBox 4"/>
@@ -6149,7 +6468,7 @@
         <p:spPr>
           <a:xfrm>
             <a:off x="150187" y="671901"/>
-            <a:ext cx="6563531" cy="7486665"/>
+            <a:ext cx="6563531" cy="9148658"/>
           </a:xfrm>
           <a:prstGeom prst="rect">
             <a:avLst/>
@@ -6168,23 +6487,28 @@
               </a:spcBef>
             </a:pPr>
             <a:r>
-              <a:rPr lang="en-GB" sz="1700" b="1" dirty="0">
+              <a:rPr lang="en-GB" sz="1600" b="1" dirty="0">
                 <a:solidFill>
                   <a:srgbClr val="1E3A5F"/>
                 </a:solidFill>
               </a:rPr>
               <a:t>Concept</a:t>
             </a:r>
-          </a:p>
-          <a:p>
-            <a:pPr algn="l"/>
-            <a:r>
-              <a:rPr lang="en-GB" sz="1600" dirty="0">
-                <a:solidFill>
-                  <a:srgbClr val="1E1E1E"/>
-                </a:solidFill>
-              </a:rPr>
-              <a:t>The Entangled Multiplexing Transceiver (EMT) proposes that when an entangled Ca⁺ ion pair is prepared on a shared measurement axis, rotation of ion A to angle θ produces a correlated shift in the continuously-monitored orientation of ion B, detectable by the local device reading only its own ion. If confirmed, this enables orientation-encoded character transmission via the Rotary Orientation Ring (ROR) lookup table.</a:t>
+            <a:endParaRPr lang="en-GB" sz="1700" b="1" dirty="0">
+              <a:solidFill>
+                <a:srgbClr val="1E3A5F"/>
+              </a:solidFill>
+            </a:endParaRPr>
+          </a:p>
+          <a:p>
+            <a:pPr algn="l"/>
+            <a:r>
+              <a:rPr lang="en-GB" sz="1600" dirty="0">
+                <a:solidFill>
+                  <a:srgbClr val="1E1E1E"/>
+                </a:solidFill>
+              </a:rPr>
+              <a:t>The Spin-State Hypothesis proposes that when an entangled Ca⁺ ion pair is prepared on a shared measurement axis, rotation of ion A to angle θ produces a correlated shift in the orientation of ion B, detectable by the local device reading only its own ion. If confirmed, this enables orientation-encoded character transmission via the Rotary Orientation Ring (ROR) lookup table.</a:t>
             </a:r>
           </a:p>
           <a:p>
@@ -6202,23 +6526,50 @@
               </a:spcBef>
             </a:pPr>
             <a:r>
-              <a:rPr lang="en-GB" sz="1700" b="1" dirty="0">
+              <a:rPr lang="en-GB" sz="1600" b="1" dirty="0">
                 <a:solidFill>
                   <a:srgbClr val="1E3A5F"/>
                 </a:solidFill>
               </a:rPr>
               <a:t>Experiment</a:t>
             </a:r>
-          </a:p>
-          <a:p>
-            <a:pPr algn="l"/>
-            <a:r>
-              <a:rPr lang="en-GB" sz="1600" dirty="0">
-                <a:solidFill>
-                  <a:srgbClr val="1E1E1E"/>
-                </a:solidFill>
-              </a:rPr>
-              <a:t>Stage 1: 1–5 entangled Ca⁺ pairs in a single lab. Ion A rotated, ion B continuously weak-measured. Before/after comparison tests for correlated orientation shift. Stage 2: same experiment with ions physically separated and all classical coupling excluded. Stage 2b: virtual Bell measurement test - two unentangled devices prepared via pairing code, correlation tested without a physical seed pair.</a:t>
+            <a:endParaRPr lang="en-GB" sz="1700" b="1" dirty="0">
+              <a:solidFill>
+                <a:srgbClr val="1E3A5F"/>
+              </a:solidFill>
+            </a:endParaRPr>
+          </a:p>
+          <a:p>
+            <a:pPr algn="l"/>
+            <a:r>
+              <a:rPr lang="en-GB" sz="1600" dirty="0">
+                <a:solidFill>
+                  <a:srgbClr val="1E1E1E"/>
+                </a:solidFill>
+              </a:rPr>
+              <a:t>Stage 1: 1–5 entangled Ca⁺ pairs in a single lab. Ion A rotated, ion B continuously weak-measured. Before/after comparison tests for correlated orientation shift.</a:t>
+            </a:r>
+          </a:p>
+          <a:p>
+            <a:pPr algn="l"/>
+            <a:r>
+              <a:rPr lang="en-GB" sz="1600" dirty="0">
+                <a:solidFill>
+                  <a:srgbClr val="1E1E1E"/>
+                </a:solidFill>
+              </a:rPr>
+              <a:t>Stage 2: same experiment with ions physically separated and all classical coupling excluded.</a:t>
+            </a:r>
+          </a:p>
+          <a:p>
+            <a:pPr algn="l"/>
+            <a:r>
+              <a:rPr lang="en-GB" sz="1600" dirty="0">
+                <a:solidFill>
+                  <a:srgbClr val="1E1E1E"/>
+                </a:solidFill>
+              </a:rPr>
+              <a:t>Stage 2b: virtual Bell measurement test - two unentangled devices prepared via pairing code, correlation tested without a physical seed pair.</a:t>
             </a:r>
           </a:p>
           <a:p>
@@ -6236,7 +6587,7 @@
               </a:spcBef>
             </a:pPr>
             <a:r>
-              <a:rPr lang="en-GB" sz="1700" b="1" dirty="0">
+              <a:rPr lang="en-GB" sz="1600" b="1" dirty="0">
                 <a:solidFill>
                   <a:srgbClr val="1E3A5F"/>
                 </a:solidFill>
@@ -6252,7 +6603,18 @@
                   <a:srgbClr val="1E1E1E"/>
                 </a:solidFill>
               </a:rPr>
-              <a:t>A 12-ion linear Paul trap: 10 data ions for √N SNR improvement, ion 11 as Device A state flag, ion 12 as Device B state flag. Each device reads only its own ions. Orientation angle encodes characters. Flag ions coordinate half-duplex timing without transmitting information. Sealed glass vacuum envelope. MCU-controlled. Self-healing via calcium supply chain and bootstrap re-entanglement.</a:t>
+              <a:t>A 12-ion linear Paul trap: 10 data ions for √N SNR improvement, ion 11 as Device A state flag, ion 12 as Device B state flag. Each device reads only its own ions. Orientation angle encodes characters.</a:t>
+            </a:r>
+          </a:p>
+          <a:p>
+            <a:pPr algn="l"/>
+            <a:r>
+              <a:rPr lang="en-GB" sz="1600" dirty="0">
+                <a:solidFill>
+                  <a:srgbClr val="1E1E1E"/>
+                </a:solidFill>
+              </a:rPr>
+              <a:t>Flag ions coordinate half-duplex timing without transmitting information. Sealed glass vacuum envelope. MCU-controlled. Self-healing via calcium supply chain and bootstrap re-entanglement.</a:t>
             </a:r>
           </a:p>
           <a:p>
@@ -6270,7 +6632,7 @@
               </a:spcBef>
             </a:pPr>
             <a:r>
-              <a:rPr lang="en-GB" sz="1700" b="1" dirty="0">
+              <a:rPr lang="en-GB" sz="1600" b="1" dirty="0">
                 <a:solidFill>
                   <a:srgbClr val="1E3A5F"/>
                 </a:solidFill>
@@ -6286,7 +6648,46 @@
                   <a:srgbClr val="1E1E1E"/>
                 </a:solidFill>
               </a:rPr>
-              <a:t>Chip-scale UHV packaging, per-ion coil fabrication, photon collection efficiency for bootstrap re-entanglement, and long-duration coherence maintenance via dynamical decoupling. All required individual capabilities are demonstrated. The challenge is integration.</a:t>
+              <a:t>Chip-scale UHV packaging, per-ion coil fabrication, photon collection efficiency for bootstrap re-entanglement, and long-duration coherence maintenance via dynamical decoupling.</a:t>
+            </a:r>
+          </a:p>
+          <a:p>
+            <a:pPr algn="l"/>
+            <a:r>
+              <a:rPr lang="en-GB" sz="1600" dirty="0">
+                <a:solidFill>
+                  <a:srgbClr val="1E1E1E"/>
+                </a:solidFill>
+              </a:rPr>
+              <a:t>All required individual capabilities are demonstrated, the challenge is integration.</a:t>
+            </a:r>
+          </a:p>
+          <a:p>
+            <a:pPr algn="l"/>
+            <a:endParaRPr lang="en-GB" sz="1600" dirty="0">
+              <a:solidFill>
+                <a:srgbClr val="1E1E1E"/>
+              </a:solidFill>
+            </a:endParaRPr>
+          </a:p>
+          <a:p>
+            <a:r>
+              <a:rPr lang="en-GB" sz="1600" b="1" dirty="0">
+                <a:solidFill>
+                  <a:srgbClr val="1E3A5F"/>
+                </a:solidFill>
+              </a:rPr>
+              <a:t>Aim</a:t>
+            </a:r>
+          </a:p>
+          <a:p>
+            <a:r>
+              <a:rPr lang="en-GB" sz="1600" dirty="0">
+                <a:solidFill>
+                  <a:srgbClr val="1E1E1E"/>
+                </a:solidFill>
+              </a:rPr>
+              <a:t>An EMT is designed to utilise the above hypothetical interaction and provides a method for communication over the vast distances of interplanetary &amp; interstellar space.</a:t>
             </a:r>
           </a:p>
         </p:txBody>
@@ -7720,40 +8121,6 @@
           </a:p>
         </p:txBody>
       </p:sp>
-      <p:sp>
-        <p:nvSpPr>
-          <p:cNvPr id="4" name="TextBox 3"/>
-          <p:cNvSpPr txBox="1"/>
-          <p:nvPr/>
-        </p:nvSpPr>
-        <p:spPr>
-          <a:xfrm>
-            <a:off x="150187" y="8778240"/>
-            <a:ext cx="6563531" cy="292388"/>
-          </a:xfrm>
-          <a:prstGeom prst="rect">
-            <a:avLst/>
-          </a:prstGeom>
-          <a:noFill/>
-        </p:spPr>
-        <p:txBody>
-          <a:bodyPr wrap="square">
-            <a:spAutoFit/>
-          </a:bodyPr>
-          <a:lstStyle/>
-          <a:p>
-            <a:pPr algn="l"/>
-            <a:r>
-              <a:rPr lang="en-GB" sz="1300" dirty="0">
-                <a:solidFill>
-                  <a:srgbClr val="788598"/>
-                </a:solidFill>
-              </a:rPr>
-              <a:t>Three read methods - Method 3 (ensemble averaging) is the primary EMT read mode</a:t>
-            </a:r>
-          </a:p>
-        </p:txBody>
-      </p:sp>
       <p:pic>
         <p:nvPicPr>
           <p:cNvPr id="5" name="Picture 4" descr="image.png"/>
@@ -7770,8 +8137,8 @@
         </p:blipFill>
         <p:spPr>
           <a:xfrm>
-            <a:off x="36576" y="566928"/>
-            <a:ext cx="6784848" cy="9006840"/>
+            <a:off x="36576" y="1799933"/>
+            <a:ext cx="6784848" cy="6306133"/>
           </a:xfrm>
           <a:prstGeom prst="rect">
             <a:avLst/>
@@ -8542,7 +8909,7 @@
         <p:spPr>
           <a:xfrm>
             <a:off x="0" y="0"/>
-            <a:ext cx="6858000" cy="523719"/>
+            <a:ext cx="6858000" cy="646331"/>
           </a:xfrm>
           <a:prstGeom prst="rect">
             <a:avLst/>
@@ -8557,12 +8924,28 @@
           <a:p>
             <a:pPr algn="ctr"/>
             <a:r>
-              <a:rPr lang="en-GB" sz="3556">
+              <a:rPr lang="en-GB" sz="3556" dirty="0">
                 <a:solidFill>
                   <a:srgbClr val="0F172A"/>
                 </a:solidFill>
               </a:rPr>
-              <a:t>The EMT Hypothesis</a:t>
+              <a:t>The </a:t>
+            </a:r>
+            <a:r>
+              <a:rPr lang="en-GB" sz="3600" dirty="0">
+                <a:solidFill>
+                  <a:srgbClr val="1E1E1E"/>
+                </a:solidFill>
+              </a:rPr>
+              <a:t>Spin-State</a:t>
+            </a:r>
+            <a:r>
+              <a:rPr lang="en-GB" sz="3556" dirty="0">
+                <a:solidFill>
+                  <a:srgbClr val="0F172A"/>
+                </a:solidFill>
+              </a:rPr>
+              <a:t> Hypothesis</a:t>
             </a:r>
           </a:p>
         </p:txBody>
@@ -8706,7 +9089,7 @@
                   <a:srgbClr val="1E1E1E"/>
                 </a:solidFill>
               </a:rPr>
-              <a:t>When particle A is rotated from HOME (0°) to angle θ, particle B undergoes a corresponding rotation from its HOME (180°) to (180° + θ), maintaining the anticorrelation of the entangled pair. This rotation of B is detectable by Device B reading only its own particle continuously.</a:t>
+              <a:t>When particle A is rotated from HOME (0°) to angle θ, particle B undergoes a corresponding rotation from its HOME (180°) to (180° + θ), maintaining the anticorrelation of the entangled pair. This rotation of B is detectable by Device B reading only its own particle.</a:t>
             </a:r>
           </a:p>
           <a:p>
@@ -11303,21 +11686,34 @@
                 <a:solidFill>
                   <a:srgbClr val="1E1E1E"/>
                 </a:solidFill>
-                <a:latin typeface="Courier New"/>
               </a:rPr>
               <a:t>  Abstract</a:t>
             </a:r>
           </a:p>
           <a:p>
-            <a:pPr algn="l"/>
             <a:r>
               <a:rPr lang="en-GB" sz="1300" dirty="0">
                 <a:solidFill>
                   <a:srgbClr val="1E1E1E"/>
                 </a:solidFill>
-                <a:latin typeface="Courier New"/>
-              </a:rPr>
-              <a:t>  The EMT Hypothesis</a:t>
+              </a:rPr>
+              <a:t>  The </a:t>
+            </a:r>
+            <a:r>
+              <a:rPr lang="en-GB" sz="1400" dirty="0">
+                <a:solidFill>
+                  <a:srgbClr val="1E1E1E"/>
+                </a:solidFill>
+              </a:rPr>
+              <a:t>Spin-State</a:t>
+            </a:r>
+            <a:r>
+              <a:rPr lang="en-GB" sz="1300" dirty="0">
+                <a:solidFill>
+                  <a:srgbClr val="1E1E1E"/>
+                </a:solidFill>
+              </a:rPr>
+              <a:t> Hypothesis</a:t>
             </a:r>
           </a:p>
           <a:p>
@@ -11326,7 +11722,6 @@
               <a:solidFill>
                 <a:srgbClr val="1E1E1E"/>
               </a:solidFill>
-              <a:latin typeface="Courier New"/>
             </a:endParaRPr>
           </a:p>
           <a:p>
@@ -11351,7 +11746,6 @@
                 <a:solidFill>
                   <a:srgbClr val="1E1E1E"/>
                 </a:solidFill>
-                <a:latin typeface="Courier New"/>
               </a:rPr>
               <a:t>  1.1  The No-Communication Theorem</a:t>
             </a:r>
@@ -11363,7 +11757,6 @@
                 <a:solidFill>
                   <a:srgbClr val="1E1E1E"/>
                 </a:solidFill>
-                <a:latin typeface="Courier New"/>
               </a:rPr>
               <a:t>  1.2  Quantum Entanglement - The Joint State</a:t>
             </a:r>
@@ -11375,7 +11768,6 @@
                 <a:solidFill>
                   <a:srgbClr val="1E1E1E"/>
                 </a:solidFill>
-                <a:latin typeface="Courier New"/>
               </a:rPr>
               <a:t>  1.3  Weak Measurement Theory</a:t>
             </a:r>
@@ -11387,7 +11779,6 @@
                 <a:solidFill>
                   <a:srgbClr val="1E1E1E"/>
                 </a:solidFill>
-                <a:latin typeface="Courier New"/>
               </a:rPr>
               <a:t>  1.4  Ensemble Averaging - Noise Reduction by √N</a:t>
             </a:r>
@@ -11399,7 +11790,6 @@
                 <a:solidFill>
                   <a:srgbClr val="1E1E1E"/>
                 </a:solidFill>
-                <a:latin typeface="Courier New"/>
               </a:rPr>
               <a:t>  1.5  The Central Experimental Question</a:t>
             </a:r>
@@ -11411,7 +11801,6 @@
                 <a:solidFill>
                   <a:srgbClr val="1E1E1E"/>
                 </a:solidFill>
-                <a:latin typeface="Courier New"/>
               </a:rPr>
               <a:t>  1.6  Orientation Encoding - The Rotary Orientation Ring</a:t>
             </a:r>
@@ -11422,7 +11811,6 @@
               <a:solidFill>
                 <a:srgbClr val="1E1E1E"/>
               </a:solidFill>
-              <a:latin typeface="Courier New"/>
             </a:endParaRPr>
           </a:p>
           <a:p>
@@ -11447,7 +11835,6 @@
                 <a:solidFill>
                   <a:srgbClr val="1E1E1E"/>
                 </a:solidFill>
-                <a:latin typeface="Courier New"/>
               </a:rPr>
               <a:t>  2.1  Ca⁺ as the Experimental Substrate</a:t>
             </a:r>
@@ -11459,7 +11846,6 @@
                 <a:solidFill>
                   <a:srgbClr val="1E1E1E"/>
                 </a:solidFill>
-                <a:latin typeface="Courier New"/>
               </a:rPr>
               <a:t>  2.2  Stage 1 - The Core Experiment</a:t>
             </a:r>
@@ -11471,7 +11857,6 @@
                 <a:solidFill>
                   <a:srgbClr val="1E1E1E"/>
                 </a:solidFill>
-                <a:latin typeface="Courier New"/>
               </a:rPr>
               <a:t>  2.3  Stage 2 - Remote Isolation Test</a:t>
             </a:r>
@@ -11483,7 +11868,6 @@
                 <a:solidFill>
                   <a:srgbClr val="1E1E1E"/>
                 </a:solidFill>
-                <a:latin typeface="Courier New"/>
               </a:rPr>
               <a:t>  2.3b Stage 2b - Virtual Bell Measurement Experiment</a:t>
             </a:r>
@@ -11495,7 +11879,6 @@
                 <a:solidFill>
                   <a:srgbClr val="1E1E1E"/>
                 </a:solidFill>
-                <a:latin typeface="Courier New"/>
               </a:rPr>
               <a:t>  2.4  Stage 3 - Coherence Maintenance and Self-Healing</a:t>
             </a:r>
@@ -11507,7 +11890,6 @@
                 <a:solidFill>
                   <a:srgbClr val="1E1E1E"/>
                 </a:solidFill>
-                <a:latin typeface="Courier New"/>
               </a:rPr>
               <a:t>  Experimental Evidence - What Is and Is Not Confirmed</a:t>
             </a:r>
@@ -11518,7 +11900,6 @@
               <a:solidFill>
                 <a:srgbClr val="1E1E1E"/>
               </a:solidFill>
-              <a:latin typeface="Courier New"/>
             </a:endParaRPr>
           </a:p>
           <a:p>
@@ -11543,7 +11924,6 @@
                 <a:solidFill>
                   <a:srgbClr val="1E1E1E"/>
                 </a:solidFill>
-                <a:latin typeface="Courier New"/>
               </a:rPr>
               <a:t>  3.1  Manufacturing Process  ·  3.1b Ca⁺ Supply Chain</a:t>
             </a:r>
@@ -11555,7 +11935,6 @@
                 <a:solidFill>
                   <a:srgbClr val="1E1E1E"/>
                 </a:solidFill>
-                <a:latin typeface="Courier New"/>
               </a:rPr>
               <a:t>  3.2  Write Mechanism  ·  3.3  Read Mechanism</a:t>
             </a:r>
@@ -11567,7 +11946,6 @@
                 <a:solidFill>
                   <a:srgbClr val="1E1E1E"/>
                 </a:solidFill>
-                <a:latin typeface="Courier New"/>
               </a:rPr>
               <a:t>  3.3b Fluorescence Emission - The Dark Axis</a:t>
             </a:r>
@@ -11579,7 +11957,6 @@
                 <a:solidFill>
                   <a:srgbClr val="1E1E1E"/>
                 </a:solidFill>
-                <a:latin typeface="Courier New"/>
               </a:rPr>
               <a:t>  3.4  The 12-Ion Line  ·  3.4b Flag Protocol Diagram</a:t>
             </a:r>
@@ -11591,7 +11968,6 @@
                 <a:solidFill>
                   <a:srgbClr val="1E1E1E"/>
                 </a:solidFill>
-                <a:latin typeface="Courier New"/>
               </a:rPr>
               <a:t>  3.5  Chip-Scale Integration</a:t>
             </a:r>
@@ -11602,7 +11978,6 @@
               <a:solidFill>
                 <a:srgbClr val="1E1E1E"/>
               </a:solidFill>
-              <a:latin typeface="Courier New"/>
             </a:endParaRPr>
           </a:p>
           <a:p>
@@ -11627,7 +12002,6 @@
                 <a:solidFill>
                   <a:srgbClr val="1E1E1E"/>
                 </a:solidFill>
-                <a:latin typeface="Courier New"/>
               </a:rPr>
               <a:t>  4.1–4.7  Fixed-pair, Re-entanglement, Retroactive Causality,</a:t>
             </a:r>
@@ -11639,7 +12013,6 @@
                 <a:solidFill>
                   <a:srgbClr val="1E1E1E"/>
                 </a:solidFill>
-                <a:latin typeface="Courier New"/>
               </a:rPr>
               <a:t>          Virtual Bell, Phone-like Operation, Call Centre</a:t>
             </a:r>
@@ -11650,7 +12023,6 @@
               <a:solidFill>
                 <a:srgbClr val="1E1E1E"/>
               </a:solidFill>
-              <a:latin typeface="Courier New"/>
             </a:endParaRPr>
           </a:p>
           <a:p>
@@ -11675,7 +12047,6 @@
                 <a:solidFill>
                   <a:srgbClr val="1E1E1E"/>
                 </a:solidFill>
-                <a:latin typeface="Courier New"/>
               </a:rPr>
               <a:t>  5.1–5.6  Confirmed Physics through Conclusion</a:t>
             </a:r>
@@ -11687,7 +12058,6 @@
                 <a:solidFill>
                   <a:srgbClr val="1E1E1E"/>
                 </a:solidFill>
-                <a:latin typeface="Courier New"/>
               </a:rPr>
               <a:t>  References</a:t>
             </a:r>
